--- a/Presentation/Resources/Vibe_Slicer_Presentation.pptx
+++ b/Presentation/Resources/Vibe_Slicer_Presentation.pptx
@@ -13,7 +13,6 @@
     <p:sldId id="258" r:id="rId8"/>
     <p:sldId id="259" r:id="rId9"/>
     <p:sldId id="260" r:id="rId10"/>
-    <p:sldId id="261" r:id="rId11"/>
   </p:sldIdLst>
   <p:sldSz cy="6858000" cx="12192000"/>
   <p:notesSz cx="6858000" cy="12192000"/>
@@ -248,7 +247,7 @@
   </p:defaultTextStyle>
   <p:extLst>
     <p:ext uri="GoogleSlidesCustomDataVersion2">
-      <go:slidesCustomData xmlns:go="http://customooxmlschemas.google.com/" r:id="rId12" roundtripDataSignature="AMtx7mhaIKKa69f1s15CvZ0vF13N09iF3Q=="/>
+      <go:slidesCustomData xmlns:go="http://customooxmlschemas.google.com/" r:id="rId11" roundtripDataSignature="AMtx7mh85uv2YykUPZvj7Uddzi4Lhf7Bdw=="/>
     </p:ext>
   </p:extLst>
 </p:presentation>
@@ -2069,7 +2068,7 @@
       </p:grpSpPr>
       <p:sp>
         <p:nvSpPr>
-          <p:cNvPr id="84" name="Google Shape;84;p5:notes"/>
+          <p:cNvPr id="84" name="Google Shape;84;p6:notes"/>
           <p:cNvSpPr/>
           <p:nvPr>
             <p:ph idx="2" type="sldImg"/>
@@ -2114,7 +2113,7 @@
       </p:sp>
       <p:sp>
         <p:nvSpPr>
-          <p:cNvPr id="85" name="Google Shape;85;p5:notes"/>
+          <p:cNvPr id="85" name="Google Shape;85;p6:notes"/>
           <p:cNvSpPr txBox="1"/>
           <p:nvPr>
             <p:ph idx="1" type="body"/>
@@ -2157,164 +2156,7 @@
       </p:sp>
       <p:sp>
         <p:nvSpPr>
-          <p:cNvPr id="86" name="Google Shape;86;p5:notes"/>
-          <p:cNvSpPr txBox="1"/>
-          <p:nvPr>
-            <p:ph idx="12" type="sldNum"/>
-          </p:nvPr>
-        </p:nvSpPr>
-        <p:spPr>
-          <a:xfrm>
-            <a:off x="3884613" y="8685213"/>
-            <a:ext cx="2971800" cy="458787"/>
-          </a:xfrm>
-          <a:prstGeom prst="rect">
-            <a:avLst/>
-          </a:prstGeom>
-          <a:noFill/>
-          <a:ln>
-            <a:noFill/>
-          </a:ln>
-        </p:spPr>
-        <p:txBody>
-          <a:bodyPr anchorCtr="0" anchor="b" bIns="45700" lIns="91425" spcFirstLastPara="1" rIns="91425" wrap="square" tIns="45700">
-            <a:noAutofit/>
-          </a:bodyPr>
-          <a:lstStyle/>
-          <a:p>
-            <a:pPr indent="0" lvl="0" marL="0" rtl="0" algn="r">
-              <a:spcBef>
-                <a:spcPts val="0"/>
-              </a:spcBef>
-              <a:spcAft>
-                <a:spcPts val="0"/>
-              </a:spcAft>
-              <a:buNone/>
-            </a:pPr>
-            <a:fld id="{00000000-1234-1234-1234-123412341234}" type="slidenum">
-              <a:rPr lang="en-US"/>
-              <a:t>‹#›</a:t>
-            </a:fld>
-            <a:endParaRPr/>
-          </a:p>
-        </p:txBody>
-      </p:sp>
-    </p:spTree>
-  </p:cSld>
-  <p:clrMapOvr>
-    <a:masterClrMapping/>
-  </p:clrMapOvr>
-</p:notes>
-</file>
-
-<file path=ppt/notesSlides/notesSlide6.xml><?xml version="1.0" encoding="utf-8"?>
-<p:notes xmlns:a="http://schemas.openxmlformats.org/drawingml/2006/main" xmlns:r="http://schemas.openxmlformats.org/officeDocument/2006/relationships" xmlns:mc="http://schemas.openxmlformats.org/markup-compatibility/2006" xmlns:mv="urn:schemas-microsoft-com:mac:vml" xmlns:p="http://schemas.openxmlformats.org/presentationml/2006/main" xmlns:c="http://schemas.openxmlformats.org/drawingml/2006/chart" xmlns:dgm="http://schemas.openxmlformats.org/drawingml/2006/diagram" xmlns:o="urn:schemas-microsoft-com:office:office" xmlns:v="urn:schemas-microsoft-com:vml" xmlns:pvml="urn:schemas-microsoft-com:office:powerpoint" xmlns:com="http://schemas.openxmlformats.org/drawingml/2006/compatibility" xmlns:p14="http://schemas.microsoft.com/office/powerpoint/2010/main" xmlns:p15="http://schemas.microsoft.com/office/powerpoint/2012/main" xmlns:ahyp="http://schemas.microsoft.com/office/drawing/2018/hyperlinkcolor" showMasterPhAnim="0" showMasterSp="0">
-  <p:cSld>
-    <p:spTree>
-      <p:nvGrpSpPr>
-        <p:cNvPr id="98" name="Shape 98"/>
-        <p:cNvGrpSpPr/>
-        <p:nvPr/>
-      </p:nvGrpSpPr>
-      <p:grpSpPr>
-        <a:xfrm>
-          <a:off x="0" y="0"/>
-          <a:ext cx="0" cy="0"/>
-          <a:chOff x="0" y="0"/>
-          <a:chExt cx="0" cy="0"/>
-        </a:xfrm>
-      </p:grpSpPr>
-      <p:sp>
-        <p:nvSpPr>
-          <p:cNvPr id="99" name="Google Shape;99;p6:notes"/>
-          <p:cNvSpPr/>
-          <p:nvPr>
-            <p:ph idx="2" type="sldImg"/>
-          </p:nvPr>
-        </p:nvSpPr>
-        <p:spPr>
-          <a:xfrm>
-            <a:off x="685800" y="1143000"/>
-            <a:ext cx="5486400" cy="3086100"/>
-          </a:xfrm>
-          <a:custGeom>
-            <a:rect b="b" l="l" r="r" t="t"/>
-            <a:pathLst>
-              <a:path extrusionOk="0" h="120000" w="120000">
-                <a:moveTo>
-                  <a:pt x="0" y="0"/>
-                </a:moveTo>
-                <a:lnTo>
-                  <a:pt x="120000" y="0"/>
-                </a:lnTo>
-                <a:lnTo>
-                  <a:pt x="120000" y="120000"/>
-                </a:lnTo>
-                <a:lnTo>
-                  <a:pt x="0" y="120000"/>
-                </a:lnTo>
-                <a:close/>
-              </a:path>
-            </a:pathLst>
-          </a:custGeom>
-          <a:noFill/>
-          <a:ln cap="flat" cmpd="sng" w="12700">
-            <a:solidFill>
-              <a:srgbClr val="000000"/>
-            </a:solidFill>
-            <a:prstDash val="solid"/>
-            <a:round/>
-            <a:headEnd len="sm" w="sm" type="none"/>
-            <a:tailEnd len="sm" w="sm" type="none"/>
-          </a:ln>
-        </p:spPr>
-      </p:sp>
-      <p:sp>
-        <p:nvSpPr>
-          <p:cNvPr id="100" name="Google Shape;100;p6:notes"/>
-          <p:cNvSpPr txBox="1"/>
-          <p:nvPr>
-            <p:ph idx="1" type="body"/>
-          </p:nvPr>
-        </p:nvSpPr>
-        <p:spPr>
-          <a:xfrm>
-            <a:off x="685800" y="4400550"/>
-            <a:ext cx="5486400" cy="3600450"/>
-          </a:xfrm>
-          <a:prstGeom prst="rect">
-            <a:avLst/>
-          </a:prstGeom>
-          <a:noFill/>
-          <a:ln>
-            <a:noFill/>
-          </a:ln>
-        </p:spPr>
-        <p:txBody>
-          <a:bodyPr anchorCtr="0" anchor="t" bIns="45700" lIns="91425" spcFirstLastPara="1" rIns="91425" wrap="square" tIns="45700">
-            <a:noAutofit/>
-          </a:bodyPr>
-          <a:lstStyle/>
-          <a:p>
-            <a:pPr indent="0" lvl="0" marL="0" rtl="0" algn="l">
-              <a:spcBef>
-                <a:spcPts val="0"/>
-              </a:spcBef>
-              <a:spcAft>
-                <a:spcPts val="0"/>
-              </a:spcAft>
-              <a:buNone/>
-            </a:pPr>
-            <a:r>
-              <a:t/>
-            </a:r>
-            <a:endParaRPr/>
-          </a:p>
-        </p:txBody>
-      </p:sp>
-      <p:sp>
-        <p:nvSpPr>
-          <p:cNvPr id="101" name="Google Shape;101;p6:notes"/>
+          <p:cNvPr id="86" name="Google Shape;86;p6:notes"/>
           <p:cNvSpPr txBox="1"/>
           <p:nvPr>
             <p:ph idx="12" type="sldNum"/>
@@ -3884,7 +3726,19 @@
                 <a:cs typeface="Calibri"/>
                 <a:sym typeface="Calibri"/>
               </a:rPr>
-              <a:t>1 / 6</a:t>
+              <a:t>1 / </a:t>
+            </a:r>
+            <a:r>
+              <a:rPr lang="en-US" sz="1100">
+                <a:solidFill>
+                  <a:srgbClr val="CFE8E6"/>
+                </a:solidFill>
+                <a:latin typeface="Calibri"/>
+                <a:ea typeface="Calibri"/>
+                <a:cs typeface="Calibri"/>
+                <a:sym typeface="Calibri"/>
+              </a:rPr>
+              <a:t>5</a:t>
             </a:r>
             <a:endParaRPr b="0" i="0" sz="1100" u="none" cap="none" strike="noStrike">
               <a:solidFill>
@@ -4904,7 +4758,19 @@
                 <a:cs typeface="Calibri"/>
                 <a:sym typeface="Calibri"/>
               </a:rPr>
-              <a:t>2 / 6</a:t>
+              <a:t>2 / </a:t>
+            </a:r>
+            <a:r>
+              <a:rPr lang="en-US" sz="1100">
+                <a:solidFill>
+                  <a:srgbClr val="5C7077"/>
+                </a:solidFill>
+                <a:latin typeface="Calibri"/>
+                <a:ea typeface="Calibri"/>
+                <a:cs typeface="Calibri"/>
+                <a:sym typeface="Calibri"/>
+              </a:rPr>
+              <a:t>5</a:t>
             </a:r>
             <a:endParaRPr b="0" i="0" sz="1100" u="none" cap="none" strike="noStrike">
               <a:solidFill>
@@ -6413,7 +6279,19 @@
                 <a:cs typeface="Calibri"/>
                 <a:sym typeface="Calibri"/>
               </a:rPr>
-              <a:t>3 / 6</a:t>
+              <a:t>3 / </a:t>
+            </a:r>
+            <a:r>
+              <a:rPr lang="en-US" sz="1100">
+                <a:solidFill>
+                  <a:srgbClr val="5C7077"/>
+                </a:solidFill>
+                <a:latin typeface="Calibri"/>
+                <a:ea typeface="Calibri"/>
+                <a:cs typeface="Calibri"/>
+                <a:sym typeface="Calibri"/>
+              </a:rPr>
+              <a:t>5</a:t>
             </a:r>
             <a:endParaRPr b="0" i="0" sz="1100" u="none" cap="none" strike="noStrike">
               <a:solidFill>
@@ -6600,7 +6478,7 @@
             <a:tbl>
               <a:tblPr>
                 <a:noFill/>
-                <a:tableStyleId>{C5A93AA3-EB49-4AC1-BF0E-63E6A62C32DC}</a:tableStyleId>
+                <a:tableStyleId>{79D9FD0F-E175-438F-B7BA-668FD9863F88}</a:tableStyleId>
               </a:tblPr>
               <a:tblGrid>
                 <a:gridCol w="2423150"/>
@@ -8987,7 +8865,19 @@
                 <a:cs typeface="Calibri"/>
                 <a:sym typeface="Calibri"/>
               </a:rPr>
-              <a:t>4 / 6</a:t>
+              <a:t>4 / </a:t>
+            </a:r>
+            <a:r>
+              <a:rPr lang="en-US" sz="1100">
+                <a:solidFill>
+                  <a:srgbClr val="5C7077"/>
+                </a:solidFill>
+                <a:latin typeface="Calibri"/>
+                <a:ea typeface="Calibri"/>
+                <a:cs typeface="Calibri"/>
+                <a:sym typeface="Calibri"/>
+              </a:rPr>
+              <a:t>5</a:t>
             </a:r>
             <a:endParaRPr b="0" i="0" sz="1100" u="none" cap="none" strike="noStrike">
               <a:solidFill>
@@ -9015,7 +8905,7 @@
     <p:bg>
       <p:bgPr>
         <a:solidFill>
-          <a:srgbClr val="F4F7F7"/>
+          <a:srgbClr val="0E2A38"/>
         </a:solidFill>
       </p:bgPr>
     </p:bg>
@@ -9035,599 +8925,7 @@
       </p:grpSpPr>
       <p:sp>
         <p:nvSpPr>
-          <p:cNvPr id="88" name="Google Shape;88;p5"/>
-          <p:cNvSpPr/>
-          <p:nvPr/>
-        </p:nvSpPr>
-        <p:spPr>
-          <a:xfrm>
-            <a:off x="640080" y="457200"/>
-            <a:ext cx="10972800" cy="640080"/>
-          </a:xfrm>
-          <a:prstGeom prst="rect">
-            <a:avLst/>
-          </a:prstGeom>
-          <a:noFill/>
-          <a:ln>
-            <a:noFill/>
-          </a:ln>
-        </p:spPr>
-        <p:txBody>
-          <a:bodyPr anchorCtr="0" anchor="ctr" bIns="45700" lIns="91425" spcFirstLastPara="1" rIns="91425" wrap="square" tIns="45700">
-            <a:noAutofit/>
-          </a:bodyPr>
-          <a:lstStyle/>
-          <a:p>
-            <a:pPr indent="0" lvl="0" marL="0" marR="0" rtl="0" algn="l">
-              <a:spcBef>
-                <a:spcPts val="0"/>
-              </a:spcBef>
-              <a:spcAft>
-                <a:spcPts val="0"/>
-              </a:spcAft>
-              <a:buClr>
-                <a:srgbClr val="0E2A38"/>
-              </a:buClr>
-              <a:buSzPts val="3200"/>
-              <a:buFont typeface="Bookman Old Style"/>
-              <a:buNone/>
-            </a:pPr>
-            <a:r>
-              <a:rPr b="1" i="0" lang="en-US" sz="3200" u="none" cap="none" strike="noStrike">
-                <a:solidFill>
-                  <a:srgbClr val="0E2A38"/>
-                </a:solidFill>
-                <a:latin typeface="Bookman Old Style"/>
-                <a:ea typeface="Bookman Old Style"/>
-                <a:cs typeface="Bookman Old Style"/>
-                <a:sym typeface="Bookman Old Style"/>
-              </a:rPr>
-              <a:t>Results: visualised</a:t>
-            </a:r>
-            <a:endParaRPr b="0" i="0" sz="3200" u="none" cap="none" strike="noStrike">
-              <a:solidFill>
-                <a:schemeClr val="dk1"/>
-              </a:solidFill>
-              <a:latin typeface="Calibri"/>
-              <a:ea typeface="Calibri"/>
-              <a:cs typeface="Calibri"/>
-              <a:sym typeface="Calibri"/>
-            </a:endParaRPr>
-          </a:p>
-        </p:txBody>
-      </p:sp>
-      <p:sp>
-        <p:nvSpPr>
-          <p:cNvPr id="89" name="Google Shape;89;p5"/>
-          <p:cNvSpPr/>
-          <p:nvPr/>
-        </p:nvSpPr>
-        <p:spPr>
-          <a:xfrm>
-            <a:off x="548640" y="1371600"/>
-            <a:ext cx="5577840" cy="3611880"/>
-          </a:xfrm>
-          <a:prstGeom prst="roundRect">
-            <a:avLst>
-              <a:gd fmla="val 1519" name="adj"/>
-            </a:avLst>
-          </a:prstGeom>
-          <a:solidFill>
-            <a:srgbClr val="FFFFFF"/>
-          </a:solidFill>
-          <a:ln cap="flat" cmpd="sng" w="12700">
-            <a:solidFill>
-              <a:srgbClr val="CFE8E6"/>
-            </a:solidFill>
-            <a:prstDash val="solid"/>
-            <a:round/>
-            <a:headEnd len="sm" w="sm" type="none"/>
-            <a:tailEnd len="sm" w="sm" type="none"/>
-          </a:ln>
-          <a:effectLst>
-            <a:outerShdw blurRad="88900" rotWithShape="0" algn="bl" dir="2700000" dist="38100">
-              <a:srgbClr val="000000">
-                <a:alpha val="16078"/>
-              </a:srgbClr>
-            </a:outerShdw>
-          </a:effectLst>
-        </p:spPr>
-        <p:txBody>
-          <a:bodyPr anchorCtr="0" anchor="ctr" bIns="91425" lIns="91425" spcFirstLastPara="1" rIns="91425" wrap="square" tIns="91425">
-            <a:noAutofit/>
-          </a:bodyPr>
-          <a:lstStyle/>
-          <a:p>
-            <a:pPr indent="0" lvl="0" marL="0" rtl="0" algn="l">
-              <a:spcBef>
-                <a:spcPts val="0"/>
-              </a:spcBef>
-              <a:spcAft>
-                <a:spcPts val="0"/>
-              </a:spcAft>
-              <a:buNone/>
-            </a:pPr>
-            <a:r>
-              <a:t/>
-            </a:r>
-            <a:endParaRPr/>
-          </a:p>
-        </p:txBody>
-      </p:sp>
-      <p:pic>
-        <p:nvPicPr>
-          <p:cNvPr descr="tmp_bench_deviation-1.png" id="90" name="Google Shape;90;p5"/>
-          <p:cNvPicPr preferRelativeResize="0"/>
-          <p:nvPr/>
-        </p:nvPicPr>
-        <p:blipFill rotWithShape="1">
-          <a:blip r:embed="rId3">
-            <a:alphaModFix/>
-          </a:blip>
-          <a:srcRect b="0" l="0" r="0" t="0"/>
-          <a:stretch/>
-        </p:blipFill>
-        <p:spPr>
-          <a:xfrm>
-            <a:off x="1257300" y="1600200"/>
-            <a:ext cx="4160520" cy="3086439"/>
-          </a:xfrm>
-          <a:prstGeom prst="rect">
-            <a:avLst/>
-          </a:prstGeom>
-          <a:noFill/>
-          <a:ln>
-            <a:noFill/>
-          </a:ln>
-        </p:spPr>
-      </p:pic>
-      <p:sp>
-        <p:nvSpPr>
-          <p:cNvPr id="91" name="Google Shape;91;p5"/>
-          <p:cNvSpPr/>
-          <p:nvPr/>
-        </p:nvSpPr>
-        <p:spPr>
-          <a:xfrm>
-            <a:off x="548640" y="5093208"/>
-            <a:ext cx="5577840" cy="320040"/>
-          </a:xfrm>
-          <a:prstGeom prst="rect">
-            <a:avLst/>
-          </a:prstGeom>
-          <a:noFill/>
-          <a:ln>
-            <a:noFill/>
-          </a:ln>
-        </p:spPr>
-        <p:txBody>
-          <a:bodyPr anchorCtr="0" anchor="ctr" bIns="45700" lIns="91425" spcFirstLastPara="1" rIns="91425" wrap="square" tIns="45700">
-            <a:noAutofit/>
-          </a:bodyPr>
-          <a:lstStyle/>
-          <a:p>
-            <a:pPr indent="0" lvl="0" marL="0" marR="0" rtl="0" algn="ctr">
-              <a:spcBef>
-                <a:spcPts val="0"/>
-              </a:spcBef>
-              <a:spcAft>
-                <a:spcPts val="0"/>
-              </a:spcAft>
-              <a:buClr>
-                <a:srgbClr val="5C7077"/>
-              </a:buClr>
-              <a:buSzPts val="1250"/>
-              <a:buFont typeface="Calibri"/>
-              <a:buNone/>
-            </a:pPr>
-            <a:r>
-              <a:rPr b="0" i="1" lang="en-US" sz="1250" u="none" cap="none" strike="noStrike">
-                <a:solidFill>
-                  <a:srgbClr val="5C7077"/>
-                </a:solidFill>
-                <a:latin typeface="Calibri"/>
-                <a:ea typeface="Calibri"/>
-                <a:cs typeface="Calibri"/>
-                <a:sym typeface="Calibri"/>
-              </a:rPr>
-              <a:t>Dimensional deviation from nominal</a:t>
-            </a:r>
-            <a:endParaRPr b="0" i="0" sz="1250" u="none" cap="none" strike="noStrike">
-              <a:solidFill>
-                <a:schemeClr val="dk1"/>
-              </a:solidFill>
-              <a:latin typeface="Calibri"/>
-              <a:ea typeface="Calibri"/>
-              <a:cs typeface="Calibri"/>
-              <a:sym typeface="Calibri"/>
-            </a:endParaRPr>
-          </a:p>
-        </p:txBody>
-      </p:sp>
-      <p:sp>
-        <p:nvSpPr>
-          <p:cNvPr id="92" name="Google Shape;92;p5"/>
-          <p:cNvSpPr/>
-          <p:nvPr/>
-        </p:nvSpPr>
-        <p:spPr>
-          <a:xfrm>
-            <a:off x="6355080" y="1371600"/>
-            <a:ext cx="5303520" cy="3611880"/>
-          </a:xfrm>
-          <a:prstGeom prst="roundRect">
-            <a:avLst>
-              <a:gd fmla="val 1519" name="adj"/>
-            </a:avLst>
-          </a:prstGeom>
-          <a:solidFill>
-            <a:srgbClr val="FFFFFF"/>
-          </a:solidFill>
-          <a:ln cap="flat" cmpd="sng" w="12700">
-            <a:solidFill>
-              <a:srgbClr val="CFE8E6"/>
-            </a:solidFill>
-            <a:prstDash val="solid"/>
-            <a:round/>
-            <a:headEnd len="sm" w="sm" type="none"/>
-            <a:tailEnd len="sm" w="sm" type="none"/>
-          </a:ln>
-          <a:effectLst>
-            <a:outerShdw blurRad="88900" rotWithShape="0" algn="bl" dir="2700000" dist="38100">
-              <a:srgbClr val="000000">
-                <a:alpha val="16078"/>
-              </a:srgbClr>
-            </a:outerShdw>
-          </a:effectLst>
-        </p:spPr>
-        <p:txBody>
-          <a:bodyPr anchorCtr="0" anchor="ctr" bIns="91425" lIns="91425" spcFirstLastPara="1" rIns="91425" wrap="square" tIns="91425">
-            <a:noAutofit/>
-          </a:bodyPr>
-          <a:lstStyle/>
-          <a:p>
-            <a:pPr indent="0" lvl="0" marL="0" rtl="0" algn="l">
-              <a:spcBef>
-                <a:spcPts val="0"/>
-              </a:spcBef>
-              <a:spcAft>
-                <a:spcPts val="0"/>
-              </a:spcAft>
-              <a:buNone/>
-            </a:pPr>
-            <a:r>
-              <a:t/>
-            </a:r>
-            <a:endParaRPr/>
-          </a:p>
-        </p:txBody>
-      </p:sp>
-      <p:pic>
-        <p:nvPicPr>
-          <p:cNvPr descr="tmp_bench_time-1.png" id="93" name="Google Shape;93;p5"/>
-          <p:cNvPicPr preferRelativeResize="0"/>
-          <p:nvPr/>
-        </p:nvPicPr>
-        <p:blipFill rotWithShape="1">
-          <a:blip r:embed="rId4">
-            <a:alphaModFix/>
-          </a:blip>
-          <a:srcRect b="0" l="0" r="0" t="0"/>
-          <a:stretch/>
-        </p:blipFill>
-        <p:spPr>
-          <a:xfrm>
-            <a:off x="6446520" y="1508760"/>
-            <a:ext cx="5120640" cy="3362206"/>
-          </a:xfrm>
-          <a:prstGeom prst="rect">
-            <a:avLst/>
-          </a:prstGeom>
-          <a:noFill/>
-          <a:ln>
-            <a:noFill/>
-          </a:ln>
-        </p:spPr>
-      </p:pic>
-      <p:sp>
-        <p:nvSpPr>
-          <p:cNvPr id="94" name="Google Shape;94;p5"/>
-          <p:cNvSpPr/>
-          <p:nvPr/>
-        </p:nvSpPr>
-        <p:spPr>
-          <a:xfrm>
-            <a:off x="6355080" y="5093208"/>
-            <a:ext cx="5303520" cy="320040"/>
-          </a:xfrm>
-          <a:prstGeom prst="rect">
-            <a:avLst/>
-          </a:prstGeom>
-          <a:noFill/>
-          <a:ln>
-            <a:noFill/>
-          </a:ln>
-        </p:spPr>
-        <p:txBody>
-          <a:bodyPr anchorCtr="0" anchor="ctr" bIns="45700" lIns="91425" spcFirstLastPara="1" rIns="91425" wrap="square" tIns="45700">
-            <a:noAutofit/>
-          </a:bodyPr>
-          <a:lstStyle/>
-          <a:p>
-            <a:pPr indent="0" lvl="0" marL="0" marR="0" rtl="0" algn="ctr">
-              <a:spcBef>
-                <a:spcPts val="0"/>
-              </a:spcBef>
-              <a:spcAft>
-                <a:spcPts val="0"/>
-              </a:spcAft>
-              <a:buClr>
-                <a:srgbClr val="5C7077"/>
-              </a:buClr>
-              <a:buSzPts val="1250"/>
-              <a:buFont typeface="Calibri"/>
-              <a:buNone/>
-            </a:pPr>
-            <a:r>
-              <a:rPr b="0" i="1" lang="en-US" sz="1250" u="none" cap="none" strike="noStrike">
-                <a:solidFill>
-                  <a:srgbClr val="5C7077"/>
-                </a:solidFill>
-                <a:latin typeface="Calibri"/>
-                <a:ea typeface="Calibri"/>
-                <a:cs typeface="Calibri"/>
-                <a:sym typeface="Calibri"/>
-              </a:rPr>
-              <a:t>Mean print time per object</a:t>
-            </a:r>
-            <a:endParaRPr b="0" i="0" sz="1250" u="none" cap="none" strike="noStrike">
-              <a:solidFill>
-                <a:schemeClr val="dk1"/>
-              </a:solidFill>
-              <a:latin typeface="Calibri"/>
-              <a:ea typeface="Calibri"/>
-              <a:cs typeface="Calibri"/>
-              <a:sym typeface="Calibri"/>
-            </a:endParaRPr>
-          </a:p>
-        </p:txBody>
-      </p:sp>
-      <p:sp>
-        <p:nvSpPr>
-          <p:cNvPr id="95" name="Google Shape;95;p5"/>
-          <p:cNvSpPr/>
-          <p:nvPr/>
-        </p:nvSpPr>
-        <p:spPr>
-          <a:xfrm>
-            <a:off x="640080" y="5486400"/>
-            <a:ext cx="10972800" cy="457200"/>
-          </a:xfrm>
-          <a:prstGeom prst="rect">
-            <a:avLst/>
-          </a:prstGeom>
-          <a:noFill/>
-          <a:ln>
-            <a:noFill/>
-          </a:ln>
-        </p:spPr>
-        <p:txBody>
-          <a:bodyPr anchorCtr="0" anchor="ctr" bIns="45700" lIns="91425" spcFirstLastPara="1" rIns="91425" wrap="square" tIns="45700">
-            <a:noAutofit/>
-          </a:bodyPr>
-          <a:lstStyle/>
-          <a:p>
-            <a:pPr indent="0" lvl="0" marL="0" marR="0" rtl="0" algn="ctr">
-              <a:spcBef>
-                <a:spcPts val="0"/>
-              </a:spcBef>
-              <a:spcAft>
-                <a:spcPts val="0"/>
-              </a:spcAft>
-              <a:buClr>
-                <a:srgbClr val="1B2A30"/>
-              </a:buClr>
-              <a:buSzPts val="1500"/>
-              <a:buFont typeface="Calibri"/>
-              <a:buNone/>
-            </a:pPr>
-            <a:r>
-              <a:rPr b="0" i="0" lang="en-US" sz="1500" u="none" cap="none" strike="noStrike">
-                <a:solidFill>
-                  <a:srgbClr val="1B2A30"/>
-                </a:solidFill>
-                <a:latin typeface="Calibri"/>
-                <a:ea typeface="Calibri"/>
-                <a:cs typeface="Calibri"/>
-                <a:sym typeface="Calibri"/>
-              </a:rPr>
-              <a:t>Accuracy is comparable across conditions; </a:t>
-            </a:r>
-            <a:r>
-              <a:rPr b="1" i="0" lang="en-US" sz="1500" u="none" cap="none" strike="noStrike">
-                <a:solidFill>
-                  <a:srgbClr val="E8853A"/>
-                </a:solidFill>
-                <a:latin typeface="Calibri"/>
-                <a:ea typeface="Calibri"/>
-                <a:cs typeface="Calibri"/>
-                <a:sym typeface="Calibri"/>
-              </a:rPr>
-              <a:t>the print-time gap on the holed plate is the real difference.</a:t>
-            </a:r>
-            <a:endParaRPr b="0" i="0" sz="1500" u="none" cap="none" strike="noStrike">
-              <a:solidFill>
-                <a:schemeClr val="dk1"/>
-              </a:solidFill>
-              <a:latin typeface="Calibri"/>
-              <a:ea typeface="Calibri"/>
-              <a:cs typeface="Calibri"/>
-              <a:sym typeface="Calibri"/>
-            </a:endParaRPr>
-          </a:p>
-        </p:txBody>
-      </p:sp>
-      <p:sp>
-        <p:nvSpPr>
-          <p:cNvPr id="96" name="Google Shape;96;p5"/>
-          <p:cNvSpPr/>
-          <p:nvPr/>
-        </p:nvSpPr>
-        <p:spPr>
-          <a:xfrm>
-            <a:off x="640080" y="6400800"/>
-            <a:ext cx="4572000" cy="274320"/>
-          </a:xfrm>
-          <a:prstGeom prst="rect">
-            <a:avLst/>
-          </a:prstGeom>
-          <a:noFill/>
-          <a:ln>
-            <a:noFill/>
-          </a:ln>
-        </p:spPr>
-        <p:txBody>
-          <a:bodyPr anchorCtr="0" anchor="ctr" bIns="0" lIns="0" spcFirstLastPara="1" rIns="0" wrap="square" tIns="0">
-            <a:noAutofit/>
-          </a:bodyPr>
-          <a:lstStyle/>
-          <a:p>
-            <a:pPr indent="0" lvl="0" marL="0" marR="0" rtl="0" algn="l">
-              <a:spcBef>
-                <a:spcPts val="0"/>
-              </a:spcBef>
-              <a:spcAft>
-                <a:spcPts val="0"/>
-              </a:spcAft>
-              <a:buClr>
-                <a:srgbClr val="5C7077"/>
-              </a:buClr>
-              <a:buSzPts val="1100"/>
-              <a:buFont typeface="Calibri"/>
-              <a:buNone/>
-            </a:pPr>
-            <a:r>
-              <a:rPr b="0" i="0" lang="en-US" sz="1100" u="none" cap="none" strike="noStrike">
-                <a:solidFill>
-                  <a:srgbClr val="5C7077"/>
-                </a:solidFill>
-                <a:latin typeface="Calibri"/>
-                <a:ea typeface="Calibri"/>
-                <a:cs typeface="Calibri"/>
-                <a:sym typeface="Calibri"/>
-              </a:rPr>
-              <a:t>University of Salzburg</a:t>
-            </a:r>
-            <a:endParaRPr b="0" i="0" sz="1100" u="none" cap="none" strike="noStrike">
-              <a:solidFill>
-                <a:schemeClr val="dk1"/>
-              </a:solidFill>
-              <a:latin typeface="Calibri"/>
-              <a:ea typeface="Calibri"/>
-              <a:cs typeface="Calibri"/>
-              <a:sym typeface="Calibri"/>
-            </a:endParaRPr>
-          </a:p>
-        </p:txBody>
-      </p:sp>
-      <p:sp>
-        <p:nvSpPr>
-          <p:cNvPr id="97" name="Google Shape;97;p5"/>
-          <p:cNvSpPr/>
-          <p:nvPr/>
-        </p:nvSpPr>
-        <p:spPr>
-          <a:xfrm>
-            <a:off x="10728655" y="6400800"/>
-            <a:ext cx="822960" cy="274320"/>
-          </a:xfrm>
-          <a:prstGeom prst="rect">
-            <a:avLst/>
-          </a:prstGeom>
-          <a:noFill/>
-          <a:ln>
-            <a:noFill/>
-          </a:ln>
-        </p:spPr>
-        <p:txBody>
-          <a:bodyPr anchorCtr="0" anchor="ctr" bIns="0" lIns="0" spcFirstLastPara="1" rIns="0" wrap="square" tIns="0">
-            <a:noAutofit/>
-          </a:bodyPr>
-          <a:lstStyle/>
-          <a:p>
-            <a:pPr indent="0" lvl="0" marL="0" marR="0" rtl="0" algn="r">
-              <a:spcBef>
-                <a:spcPts val="0"/>
-              </a:spcBef>
-              <a:spcAft>
-                <a:spcPts val="0"/>
-              </a:spcAft>
-              <a:buClr>
-                <a:srgbClr val="5C7077"/>
-              </a:buClr>
-              <a:buSzPts val="1100"/>
-              <a:buFont typeface="Calibri"/>
-              <a:buNone/>
-            </a:pPr>
-            <a:r>
-              <a:rPr b="0" i="0" lang="en-US" sz="1100" u="none" cap="none" strike="noStrike">
-                <a:solidFill>
-                  <a:srgbClr val="5C7077"/>
-                </a:solidFill>
-                <a:latin typeface="Calibri"/>
-                <a:ea typeface="Calibri"/>
-                <a:cs typeface="Calibri"/>
-                <a:sym typeface="Calibri"/>
-              </a:rPr>
-              <a:t>5 / 6</a:t>
-            </a:r>
-            <a:endParaRPr b="0" i="0" sz="1100" u="none" cap="none" strike="noStrike">
-              <a:solidFill>
-                <a:schemeClr val="dk1"/>
-              </a:solidFill>
-              <a:latin typeface="Calibri"/>
-              <a:ea typeface="Calibri"/>
-              <a:cs typeface="Calibri"/>
-              <a:sym typeface="Calibri"/>
-            </a:endParaRPr>
-          </a:p>
-        </p:txBody>
-      </p:sp>
-    </p:spTree>
-  </p:cSld>
-  <p:clrMapOvr>
-    <a:masterClrMapping/>
-  </p:clrMapOvr>
-</p:sld>
-</file>
-
-<file path=ppt/slides/slide6.xml><?xml version="1.0" encoding="utf-8"?>
-<p:sld xmlns:a="http://schemas.openxmlformats.org/drawingml/2006/main" xmlns:r="http://schemas.openxmlformats.org/officeDocument/2006/relationships" xmlns:mc="http://schemas.openxmlformats.org/markup-compatibility/2006" xmlns:mv="urn:schemas-microsoft-com:mac:vml" xmlns:p="http://schemas.openxmlformats.org/presentationml/2006/main" xmlns:c="http://schemas.openxmlformats.org/drawingml/2006/chart" xmlns:dgm="http://schemas.openxmlformats.org/drawingml/2006/diagram" xmlns:o="urn:schemas-microsoft-com:office:office" xmlns:v="urn:schemas-microsoft-com:vml" xmlns:pvml="urn:schemas-microsoft-com:office:powerpoint" xmlns:com="http://schemas.openxmlformats.org/drawingml/2006/compatibility" xmlns:p14="http://schemas.microsoft.com/office/powerpoint/2010/main" xmlns:p15="http://schemas.microsoft.com/office/powerpoint/2012/main" xmlns:ahyp="http://schemas.microsoft.com/office/drawing/2018/hyperlinkcolor">
-  <p:cSld>
-    <p:bg>
-      <p:bgPr>
-        <a:solidFill>
-          <a:srgbClr val="0E2A38"/>
-        </a:solidFill>
-      </p:bgPr>
-    </p:bg>
-    <p:spTree>
-      <p:nvGrpSpPr>
-        <p:cNvPr id="102" name="Shape 102"/>
-        <p:cNvGrpSpPr/>
-        <p:nvPr/>
-      </p:nvGrpSpPr>
-      <p:grpSpPr>
-        <a:xfrm>
-          <a:off x="0" y="0"/>
-          <a:ext cx="0" cy="0"/>
-          <a:chOff x="0" y="0"/>
-          <a:chExt cx="0" cy="0"/>
-        </a:xfrm>
-      </p:grpSpPr>
-      <p:sp>
-        <p:nvSpPr>
-          <p:cNvPr id="103" name="Google Shape;103;p6"/>
+          <p:cNvPr id="88" name="Google Shape;88;p6"/>
           <p:cNvSpPr/>
           <p:nvPr/>
         </p:nvSpPr>
@@ -9690,7 +8988,7 @@
       </p:sp>
       <p:sp>
         <p:nvSpPr>
-          <p:cNvPr id="104" name="Google Shape;104;p6"/>
+          <p:cNvPr id="89" name="Google Shape;89;p6"/>
           <p:cNvSpPr/>
           <p:nvPr/>
         </p:nvSpPr>
@@ -9748,7 +9046,7 @@
       </p:sp>
       <p:sp>
         <p:nvSpPr>
-          <p:cNvPr id="105" name="Google Shape;105;p6"/>
+          <p:cNvPr id="90" name="Google Shape;90;p6"/>
           <p:cNvSpPr/>
           <p:nvPr/>
         </p:nvSpPr>
@@ -9811,7 +9109,7 @@
       </p:sp>
       <p:sp>
         <p:nvSpPr>
-          <p:cNvPr id="106" name="Google Shape;106;p6"/>
+          <p:cNvPr id="91" name="Google Shape;91;p6"/>
           <p:cNvSpPr/>
           <p:nvPr/>
         </p:nvSpPr>
@@ -9898,7 +9196,7 @@
       </p:sp>
       <p:sp>
         <p:nvSpPr>
-          <p:cNvPr id="107" name="Google Shape;107;p6"/>
+          <p:cNvPr id="92" name="Google Shape;92;p6"/>
           <p:cNvSpPr/>
           <p:nvPr/>
         </p:nvSpPr>
@@ -9998,7 +9296,7 @@
       </p:sp>
       <p:sp>
         <p:nvSpPr>
-          <p:cNvPr id="108" name="Google Shape;108;p6"/>
+          <p:cNvPr id="93" name="Google Shape;93;p6"/>
           <p:cNvSpPr/>
           <p:nvPr/>
         </p:nvSpPr>
@@ -10056,7 +9354,7 @@
       </p:sp>
       <p:sp>
         <p:nvSpPr>
-          <p:cNvPr id="109" name="Google Shape;109;p6"/>
+          <p:cNvPr id="94" name="Google Shape;94;p6"/>
           <p:cNvSpPr/>
           <p:nvPr/>
         </p:nvSpPr>
@@ -10119,7 +9417,7 @@
       </p:sp>
       <p:sp>
         <p:nvSpPr>
-          <p:cNvPr id="110" name="Google Shape;110;p6"/>
+          <p:cNvPr id="95" name="Google Shape;95;p6"/>
           <p:cNvSpPr/>
           <p:nvPr/>
         </p:nvSpPr>
@@ -10182,7 +9480,7 @@
       </p:sp>
       <p:sp>
         <p:nvSpPr>
-          <p:cNvPr id="111" name="Google Shape;111;p6"/>
+          <p:cNvPr id="96" name="Google Shape;96;p6"/>
           <p:cNvSpPr/>
           <p:nvPr/>
         </p:nvSpPr>
@@ -10245,7 +9543,7 @@
       </p:sp>
       <p:sp>
         <p:nvSpPr>
-          <p:cNvPr id="112" name="Google Shape;112;p6"/>
+          <p:cNvPr id="97" name="Google Shape;97;p6"/>
           <p:cNvSpPr/>
           <p:nvPr/>
         </p:nvSpPr>
@@ -10320,7 +9618,7 @@
       </p:sp>
       <p:sp>
         <p:nvSpPr>
-          <p:cNvPr id="113" name="Google Shape;113;p6"/>
+          <p:cNvPr id="98" name="Google Shape;98;p6"/>
           <p:cNvSpPr/>
           <p:nvPr/>
         </p:nvSpPr>
@@ -10383,7 +9681,7 @@
       </p:sp>
       <p:sp>
         <p:nvSpPr>
-          <p:cNvPr id="114" name="Google Shape;114;p6"/>
+          <p:cNvPr id="99" name="Google Shape;99;p6"/>
           <p:cNvSpPr/>
           <p:nvPr/>
         </p:nvSpPr>
@@ -10446,7 +9744,7 @@
       </p:sp>
       <p:sp>
         <p:nvSpPr>
-          <p:cNvPr id="115" name="Google Shape;115;p6"/>
+          <p:cNvPr id="100" name="Google Shape;100;p6"/>
           <p:cNvSpPr/>
           <p:nvPr/>
         </p:nvSpPr>
@@ -10484,6 +9782,18 @@
               <a:buNone/>
             </a:pPr>
             <a:r>
+              <a:rPr lang="en-US" sz="1100">
+                <a:solidFill>
+                  <a:srgbClr val="CFE8E6"/>
+                </a:solidFill>
+                <a:latin typeface="Calibri"/>
+                <a:ea typeface="Calibri"/>
+                <a:cs typeface="Calibri"/>
+                <a:sym typeface="Calibri"/>
+              </a:rPr>
+              <a:t>5</a:t>
+            </a:r>
+            <a:r>
               <a:rPr b="0" i="0" lang="en-US" sz="1100" u="none" cap="none" strike="noStrike">
                 <a:solidFill>
                   <a:srgbClr val="CFE8E6"/>
@@ -10493,7 +9803,19 @@
                 <a:cs typeface="Calibri"/>
                 <a:sym typeface="Calibri"/>
               </a:rPr>
-              <a:t>6 / 6</a:t>
+              <a:t> / </a:t>
+            </a:r>
+            <a:r>
+              <a:rPr lang="en-US" sz="1100">
+                <a:solidFill>
+                  <a:srgbClr val="CFE8E6"/>
+                </a:solidFill>
+                <a:latin typeface="Calibri"/>
+                <a:ea typeface="Calibri"/>
+                <a:cs typeface="Calibri"/>
+                <a:sym typeface="Calibri"/>
+              </a:rPr>
+              <a:t>5</a:t>
             </a:r>
             <a:endParaRPr b="0" i="0" sz="1100" u="none" cap="none" strike="noStrike">
               <a:solidFill>
